--- a/classes/parte-12-osint-e-ingenieria-social/258-campanas-de-phishing-con-gophish/clase-258-presentacion.pptx
+++ b/classes/parte-12-osint-e-ingenieria-social/258-campanas-de-phishing-con-gophish/clase-258-presentacion.pptx
@@ -18,6 +18,10 @@
     <p:sldId id="266" r:id="rId17"/>
     <p:sldId id="267" r:id="rId18"/>
     <p:sldId id="268" r:id="rId19"/>
+    <p:sldId id="269" r:id="rId20"/>
+    <p:sldId id="270" r:id="rId21"/>
+    <p:sldId id="271" r:id="rId22"/>
+    <p:sldId id="272" r:id="rId23"/>
   </p:sldIdLst>
   <p:sldSz cx="9144000" cy="6858000" type="screen4x3"/>
   <p:notesSz cx="6858000" cy="9144000"/>
@@ -3199,7 +3203,7 @@
                   <a:srgbClr val="0B3D2E"/>
                 </a:solidFill>
               </a:rPr>
-              <a:t>📝 Reto verificable</a:t>
+              <a:t>🧰 Herramientas y preparación</a:t>
             </a:r>
           </a:p>
         </p:txBody>
@@ -3237,52 +3241,67 @@
                   <a:srgbClr val="22282E"/>
                 </a:solidFill>
               </a:rPr>
-              <a:t>•  Ejecuta una campaña de phishing de laboratorio de extremo a extremo contra tus cuentas de prueba</a:t>
-            </a:r>
-          </a:p>
-          <a:p>
-            <a:pPr>
-              <a:spcAft>
-                <a:spcPts val="600"/>
-              </a:spcAft>
-            </a:pPr>
-            <a:r>
-              <a:rPr sz="1500">
-                <a:solidFill>
-                  <a:srgbClr val="22282E"/>
-                </a:solidFill>
-              </a:rPr>
-              <a:t>•  y entrega un informe con métricas (envíos, aperturas, clics, reportes) y un plan de formación.</a:t>
-            </a:r>
-          </a:p>
-          <a:p>
-            <a:pPr>
-              <a:spcAft>
-                <a:spcPts val="600"/>
-              </a:spcAft>
-            </a:pPr>
-            <a:r>
-              <a:rPr sz="1500">
-                <a:solidFill>
-                  <a:srgbClr val="22282E"/>
-                </a:solidFill>
-              </a:rPr>
-              <a:t>•  Criterio de aceptación: ninguna credencial real fue capturada, todos los destinatarios eran</a:t>
-            </a:r>
-          </a:p>
-          <a:p>
-            <a:pPr>
-              <a:spcAft>
-                <a:spcPts val="600"/>
-              </a:spcAft>
-            </a:pPr>
-            <a:r>
-              <a:rPr sz="1500">
-                <a:solidFill>
-                  <a:srgbClr val="22282E"/>
-                </a:solidFill>
-              </a:rPr>
-              <a:t>•  propios/autorizados, y el informe incluye tasa de reporte y al menos tres acciones de mejora.</a:t>
+              <a:t>•  GoPhish: descarga el binario de getgophish.com, ejecútalo en una VM aislada; primer login con la contraseña que muestra el log.</a:t>
+            </a:r>
+          </a:p>
+          <a:p>
+            <a:pPr>
+              <a:spcAft>
+                <a:spcPts val="600"/>
+              </a:spcAft>
+            </a:pPr>
+            <a:r>
+              <a:rPr sz="1500">
+                <a:solidFill>
+                  <a:srgbClr val="22282E"/>
+                </a:solidFill>
+              </a:rPr>
+              <a:t>•  Servidor de correo de laboratorio: MailHog/Postfix propio o un SMTP de pruebas; nunca un dominio ajeno.</a:t>
+            </a:r>
+          </a:p>
+          <a:p>
+            <a:pPr>
+              <a:spcAft>
+                <a:spcPts val="600"/>
+              </a:spcAft>
+            </a:pPr>
+            <a:r>
+              <a:rPr sz="1500">
+                <a:solidFill>
+                  <a:srgbClr val="22282E"/>
+                </a:solidFill>
+              </a:rPr>
+              <a:t>•  Dominio y TLS de prueba: para landing pages; certificado Let's Encrypt en el lab.</a:t>
+            </a:r>
+          </a:p>
+          <a:p>
+            <a:pPr>
+              <a:spcAft>
+                <a:spcPts val="600"/>
+              </a:spcAft>
+            </a:pPr>
+            <a:r>
+              <a:rPr sz="1500">
+                <a:solidFill>
+                  <a:srgbClr val="22282E"/>
+                </a:solidFill>
+              </a:rPr>
+              <a:t>•  Grupo de prueba: cuentas propias o compañeros consintientes.</a:t>
+            </a:r>
+          </a:p>
+          <a:p>
+            <a:pPr>
+              <a:spcAft>
+                <a:spcPts val="600"/>
+              </a:spcAft>
+            </a:pPr>
+            <a:r>
+              <a:rPr sz="1500">
+                <a:solidFill>
+                  <a:srgbClr val="22282E"/>
+                </a:solidFill>
+              </a:rPr>
+              <a:t>•  Recordatorio: este ejercicio se hace contra tu propio entorno o con autorización escrita; las landing pages no almacenan credenciales reales.</a:t>
             </a:r>
           </a:p>
         </p:txBody>
@@ -3333,7 +3352,7 @@
                   <a:srgbClr val="0B3D2E"/>
                 </a:solidFill>
               </a:rPr>
-              <a:t>⚠️ Errores comunes</a:t>
+              <a:t>🧪 Laboratorio guiado (entorno propio / autorizado)</a:t>
             </a:r>
           </a:p>
         </p:txBody>
@@ -3371,67 +3390,97 @@
                   <a:srgbClr val="22282E"/>
                 </a:solidFill>
               </a:rPr>
-              <a:t>•  Correos marcados como spam — Falta SPF/DKIM en el lab o dominio con mala reputación. Configura autenticación de correo.</a:t>
-            </a:r>
-          </a:p>
-          <a:p>
-            <a:pPr>
-              <a:spcAft>
-                <a:spcPts val="600"/>
-              </a:spcAft>
-            </a:pPr>
-            <a:r>
-              <a:rPr sz="1500">
-                <a:solidFill>
-                  <a:srgbClr val="22282E"/>
-                </a:solidFill>
-              </a:rPr>
-              <a:t>•  No se registran aperturas — Cliente bloquea imágenes (tracking pixel). Considera el clic como métrica principal.</a:t>
-            </a:r>
-          </a:p>
-          <a:p>
-            <a:pPr>
-              <a:spcAft>
-                <a:spcPts val="600"/>
-              </a:spcAft>
-            </a:pPr>
-            <a:r>
-              <a:rPr sz="1500">
-                <a:solidFill>
-                  <a:srgbClr val="22282E"/>
-                </a:solidFill>
-              </a:rPr>
-              <a:t>•  Landing page captura contraseñas — Configuración por defecto peligrosa. Desactiva la captura en un simulacro ético.</a:t>
-            </a:r>
-          </a:p>
-          <a:p>
-            <a:pPr>
-              <a:spcAft>
-                <a:spcPts val="600"/>
-              </a:spcAft>
-            </a:pPr>
-            <a:r>
-              <a:rPr sz="1500">
-                <a:solidFill>
-                  <a:srgbClr val="22282E"/>
-                </a:solidFill>
-              </a:rPr>
-              <a:t>•  Campaña llega a no autorizados — Grupo mal filtrado. Verifica la lista antes de lanzar.</a:t>
-            </a:r>
-          </a:p>
-          <a:p>
-            <a:pPr>
-              <a:spcAft>
-                <a:spcPts val="600"/>
-              </a:spcAft>
-            </a:pPr>
-            <a:r>
-              <a:rPr sz="1500">
-                <a:solidFill>
-                  <a:srgbClr val="22282E"/>
-                </a:solidFill>
-              </a:rPr>
-              <a:t>•  Empleados molestos/desconfiados — Faltó comunicación y enfoque educativo. Forma, no castigues.</a:t>
+              <a:t>•  Arranca GoPhish en la VM y accede al panel https://127.0.0.1:3333; cambia la contraseña inicial.</a:t>
+            </a:r>
+          </a:p>
+          <a:p>
+            <a:pPr>
+              <a:spcAft>
+                <a:spcPts val="600"/>
+              </a:spcAft>
+            </a:pPr>
+            <a:r>
+              <a:rPr sz="1500">
+                <a:solidFill>
+                  <a:srgbClr val="22282E"/>
+                </a:solidFill>
+              </a:rPr>
+              <a:t>•  Crea un Sending Profile apuntando a tu SMTP de laboratorio (MailHog/Postfix).</a:t>
+            </a:r>
+          </a:p>
+          <a:p>
+            <a:pPr>
+              <a:spcAft>
+                <a:spcPts val="600"/>
+              </a:spcAft>
+            </a:pPr>
+            <a:r>
+              <a:rPr sz="1500">
+                <a:solidFill>
+                  <a:srgbClr val="22282E"/>
+                </a:solidFill>
+              </a:rPr>
+              <a:t>•  Diseña una Email Template con un pretexto realista (ej.: "actualiza tu acceso") y añade el tracking.</a:t>
+            </a:r>
+          </a:p>
+          <a:p>
+            <a:pPr>
+              <a:spcAft>
+                <a:spcPts val="600"/>
+              </a:spcAft>
+            </a:pPr>
+            <a:r>
+              <a:rPr sz="1500">
+                <a:solidFill>
+                  <a:srgbClr val="22282E"/>
+                </a:solidFill>
+              </a:rPr>
+              <a:t>•  Crea una Landing Page que muestre un mensaje educativo tras el clic; desactiva la captura de contraseñas.</a:t>
+            </a:r>
+          </a:p>
+          <a:p>
+            <a:pPr>
+              <a:spcAft>
+                <a:spcPts val="600"/>
+              </a:spcAft>
+            </a:pPr>
+            <a:r>
+              <a:rPr sz="1500">
+                <a:solidFill>
+                  <a:srgbClr val="22282E"/>
+                </a:solidFill>
+              </a:rPr>
+              <a:t>•  Define un Users &amp; Groups con cuentas de prueba propias.</a:t>
+            </a:r>
+          </a:p>
+          <a:p>
+            <a:pPr>
+              <a:spcAft>
+                <a:spcPts val="600"/>
+              </a:spcAft>
+            </a:pPr>
+            <a:r>
+              <a:rPr sz="1500">
+                <a:solidFill>
+                  <a:srgbClr val="22282E"/>
+                </a:solidFill>
+              </a:rPr>
+              <a:t>•  Lanza la Campaign enlazando profile, template, page y grupo; envía a las cuentas de laboratorio.</a:t>
+            </a:r>
+          </a:p>
+          <a:p>
+            <a:pPr>
+              <a:spcAft>
+                <a:spcPts val="600"/>
+              </a:spcAft>
+            </a:pPr>
+            <a:r>
+              <a:rPr sz="1500">
+                <a:solidFill>
+                  <a:srgbClr val="22282E"/>
+                </a:solidFill>
+              </a:rPr>
+              <a:t>•  Observa el dashboard en tiempo real: enviados, abiertos, clicados, formularios.</a:t>
             </a:r>
           </a:p>
         </p:txBody>
@@ -3482,7 +3531,7 @@
                   <a:srgbClr val="0B3D2E"/>
                 </a:solidFill>
               </a:rPr>
-              <a:t>❓ Preguntas frecuentes</a:t>
+              <a:t>✍️ Ejercicios</a:t>
             </a:r>
           </a:p>
         </p:txBody>
@@ -3520,97 +3569,82 @@
                   <a:srgbClr val="22282E"/>
                 </a:solidFill>
               </a:rPr>
-              <a:t>•  ❓ ¿GoPhish roba contraseñas?</a:t>
-            </a:r>
-          </a:p>
-          <a:p>
-            <a:pPr>
-              <a:spcAft>
-                <a:spcPts val="600"/>
-              </a:spcAft>
-            </a:pPr>
-            <a:r>
-              <a:rPr sz="1500">
-                <a:solidFill>
-                  <a:srgbClr val="22282E"/>
-                </a:solidFill>
-              </a:rPr>
-              <a:t>•  Puede capturar lo enviado en un formulario, pero en un simulacro ético se desactiva esa captura:</a:t>
-            </a:r>
-          </a:p>
-          <a:p>
-            <a:pPr>
-              <a:spcAft>
-                <a:spcPts val="600"/>
-              </a:spcAft>
-            </a:pPr>
-            <a:r>
-              <a:rPr sz="1500">
-                <a:solidFill>
-                  <a:srgbClr val="22282E"/>
-                </a:solidFill>
-              </a:rPr>
-              <a:t>•  solo se registra el evento del clic para medir, no la credencial.</a:t>
-            </a:r>
-          </a:p>
-          <a:p>
-            <a:pPr>
-              <a:spcAft>
-                <a:spcPts val="600"/>
-              </a:spcAft>
-            </a:pPr>
-            <a:r>
-              <a:rPr sz="1500">
-                <a:solidFill>
-                  <a:srgbClr val="22282E"/>
-                </a:solidFill>
-              </a:rPr>
-              <a:t>•  ❓ ¿Aviso a los empleados de que habrá simulacros?</a:t>
-            </a:r>
-          </a:p>
-          <a:p>
-            <a:pPr>
-              <a:spcAft>
-                <a:spcPts val="600"/>
-              </a:spcAft>
-            </a:pPr>
-            <a:r>
-              <a:rPr sz="1500">
-                <a:solidFill>
-                  <a:srgbClr val="22282E"/>
-                </a:solidFill>
-              </a:rPr>
-              <a:t>•  Se comunica la política general (que pueden ocurrir simulacros) sin anunciar cada campaña. La</a:t>
-            </a:r>
-          </a:p>
-          <a:p>
-            <a:pPr>
-              <a:spcAft>
-                <a:spcPts val="600"/>
-              </a:spcAft>
-            </a:pPr>
-            <a:r>
-              <a:rPr sz="1500">
-                <a:solidFill>
-                  <a:srgbClr val="22282E"/>
-                </a:solidFill>
-              </a:rPr>
-              <a:t>•  transparencia del programa y el enfoque formativo son clave.</a:t>
-            </a:r>
-          </a:p>
-          <a:p>
-            <a:pPr>
-              <a:spcAft>
-                <a:spcPts val="600"/>
-              </a:spcAft>
-            </a:pPr>
-            <a:r>
-              <a:rPr sz="1500">
-                <a:solidFill>
-                  <a:srgbClr val="22282E"/>
-                </a:solidFill>
-              </a:rPr>
-              <a:t>•  ❓ ¿Qué métrica importa más?</a:t>
+              <a:t>•  Crea dos plantillas con distinto nivel de urgencia y compara (hipotéticamente) su impacto.</a:t>
+            </a:r>
+          </a:p>
+          <a:p>
+            <a:pPr>
+              <a:spcAft>
+                <a:spcPts val="600"/>
+              </a:spcAft>
+            </a:pPr>
+            <a:r>
+              <a:rPr sz="1500">
+                <a:solidFill>
+                  <a:srgbClr val="22282E"/>
+                </a:solidFill>
+              </a:rPr>
+              <a:t>•  Configura una landing page que solo eduque, sin capturar credenciales, y explica por qué.</a:t>
+            </a:r>
+          </a:p>
+          <a:p>
+            <a:pPr>
+              <a:spcAft>
+                <a:spcPts val="600"/>
+              </a:spcAft>
+            </a:pPr>
+            <a:r>
+              <a:rPr sz="1500">
+                <a:solidFill>
+                  <a:srgbClr val="22282E"/>
+                </a:solidFill>
+              </a:rPr>
+              <a:t>•  Interpreta un dashboard de campaña y prioriza acciones.</a:t>
+            </a:r>
+          </a:p>
+          <a:p>
+            <a:pPr>
+              <a:spcAft>
+                <a:spcPts val="600"/>
+              </a:spcAft>
+            </a:pPr>
+            <a:r>
+              <a:rPr sz="1500">
+                <a:solidFill>
+                  <a:srgbClr val="22282E"/>
+                </a:solidFill>
+              </a:rPr>
+              <a:t>•  Diseña la comunicación posterior que forma sin culpabilizar.</a:t>
+            </a:r>
+          </a:p>
+          <a:p>
+            <a:pPr>
+              <a:spcAft>
+                <a:spcPts val="600"/>
+              </a:spcAft>
+            </a:pPr>
+            <a:r>
+              <a:rPr sz="1500">
+                <a:solidFill>
+                  <a:srgbClr val="22282E"/>
+                </a:solidFill>
+              </a:rPr>
+              <a:t>•  Explica cómo evitar que la campaña afecte a personas fuera del alcance.</a:t>
+            </a:r>
+          </a:p>
+          <a:p>
+            <a:pPr>
+              <a:spcAft>
+                <a:spcPts val="600"/>
+              </a:spcAft>
+            </a:pPr>
+            <a:r>
+              <a:rPr sz="1500">
+                <a:solidFill>
+                  <a:srgbClr val="22282E"/>
+                </a:solidFill>
+              </a:rPr>
+              <a:t>•  Investiga los requisitos legales de un simulacro de phishing corporativo en tu región.</a:t>
             </a:r>
           </a:p>
         </p:txBody>
@@ -3661,7 +3695,7 @@
                   <a:srgbClr val="0B3D2E"/>
                 </a:solidFill>
               </a:rPr>
-              <a:t>🔗 Referencias</a:t>
+              <a:t>📝 Reto verificable</a:t>
             </a:r>
           </a:p>
         </p:txBody>
@@ -3699,6 +3733,468 @@
                   <a:srgbClr val="22282E"/>
                 </a:solidFill>
               </a:rPr>
+              <a:t>•  Ejecuta una campaña de phishing de laboratorio de extremo a extremo contra tus cuentas de prueba</a:t>
+            </a:r>
+          </a:p>
+          <a:p>
+            <a:pPr>
+              <a:spcAft>
+                <a:spcPts val="600"/>
+              </a:spcAft>
+            </a:pPr>
+            <a:r>
+              <a:rPr sz="1500">
+                <a:solidFill>
+                  <a:srgbClr val="22282E"/>
+                </a:solidFill>
+              </a:rPr>
+              <a:t>•  y entrega un informe con métricas (envíos, aperturas, clics, reportes) y un plan de formación.</a:t>
+            </a:r>
+          </a:p>
+          <a:p>
+            <a:pPr>
+              <a:spcAft>
+                <a:spcPts val="600"/>
+              </a:spcAft>
+            </a:pPr>
+            <a:r>
+              <a:rPr sz="1500">
+                <a:solidFill>
+                  <a:srgbClr val="22282E"/>
+                </a:solidFill>
+              </a:rPr>
+              <a:t>•  Criterio de aceptación: ninguna credencial real fue capturada, todos los destinatarios eran</a:t>
+            </a:r>
+          </a:p>
+          <a:p>
+            <a:pPr>
+              <a:spcAft>
+                <a:spcPts val="600"/>
+              </a:spcAft>
+            </a:pPr>
+            <a:r>
+              <a:rPr sz="1500">
+                <a:solidFill>
+                  <a:srgbClr val="22282E"/>
+                </a:solidFill>
+              </a:rPr>
+              <a:t>•  propios/autorizados, y el informe incluye tasa de reporte y al menos tres acciones de mejora.</a:t>
+            </a:r>
+          </a:p>
+        </p:txBody>
+      </p:sp>
+    </p:spTree>
+  </p:cSld>
+  <p:clrMapOvr>
+    <a:masterClrMapping/>
+  </p:clrMapOvr>
+</p:sld>
+</file>
+
+<file path=ppt/slides/slide14.xml><?xml version="1.0" encoding="utf-8"?>
+<p:sld xmlns:a="http://schemas.openxmlformats.org/drawingml/2006/main" xmlns:p="http://schemas.openxmlformats.org/presentationml/2006/main" xmlns:r="http://schemas.openxmlformats.org/officeDocument/2006/relationships">
+  <p:cSld>
+    <p:spTree>
+      <p:nvGrpSpPr>
+        <p:cNvPr id="1" name=""/>
+        <p:cNvGrpSpPr/>
+        <p:nvPr/>
+      </p:nvGrpSpPr>
+      <p:grpSpPr/>
+      <p:sp>
+        <p:nvSpPr>
+          <p:cNvPr id="2" name="TextBox 1"/>
+          <p:cNvSpPr txBox="1"/>
+          <p:nvPr/>
+        </p:nvSpPr>
+        <p:spPr>
+          <a:xfrm>
+            <a:off x="457200" y="320040"/>
+            <a:ext cx="8229600" cy="822960"/>
+          </a:xfrm>
+          <a:prstGeom prst="rect">
+            <a:avLst/>
+          </a:prstGeom>
+          <a:noFill/>
+        </p:spPr>
+        <p:txBody>
+          <a:bodyPr wrap="square">
+            <a:spAutoFit/>
+          </a:bodyPr>
+          <a:lstStyle/>
+          <a:p>
+            <a:r>
+              <a:rPr sz="2600" b="1">
+                <a:solidFill>
+                  <a:srgbClr val="0B3D2E"/>
+                </a:solidFill>
+              </a:rPr>
+              <a:t>⚠️ Errores comunes</a:t>
+            </a:r>
+          </a:p>
+        </p:txBody>
+      </p:sp>
+      <p:sp>
+        <p:nvSpPr>
+          <p:cNvPr id="3" name="TextBox 2"/>
+          <p:cNvSpPr txBox="1"/>
+          <p:nvPr/>
+        </p:nvSpPr>
+        <p:spPr>
+          <a:xfrm>
+            <a:off x="457200" y="1280160"/>
+            <a:ext cx="8229600" cy="4937760"/>
+          </a:xfrm>
+          <a:prstGeom prst="rect">
+            <a:avLst/>
+          </a:prstGeom>
+          <a:noFill/>
+        </p:spPr>
+        <p:txBody>
+          <a:bodyPr wrap="square">
+            <a:spAutoFit/>
+          </a:bodyPr>
+          <a:lstStyle/>
+          <a:p>
+            <a:pPr>
+              <a:spcAft>
+                <a:spcPts val="600"/>
+              </a:spcAft>
+            </a:pPr>
+            <a:r>
+              <a:rPr sz="1500">
+                <a:solidFill>
+                  <a:srgbClr val="22282E"/>
+                </a:solidFill>
+              </a:rPr>
+              <a:t>•  Correos marcados como spam — Falta SPF/DKIM en el lab o dominio con mala reputación. Configura autenticación de correo.</a:t>
+            </a:r>
+          </a:p>
+          <a:p>
+            <a:pPr>
+              <a:spcAft>
+                <a:spcPts val="600"/>
+              </a:spcAft>
+            </a:pPr>
+            <a:r>
+              <a:rPr sz="1500">
+                <a:solidFill>
+                  <a:srgbClr val="22282E"/>
+                </a:solidFill>
+              </a:rPr>
+              <a:t>•  No se registran aperturas — Cliente o gateway bloquea imágenes; además, los escáneres pueden abrirlas. Trata apertura y clic como señales imperfectas y prioriza reporte, respuesta y cumplimiento del…</a:t>
+            </a:r>
+          </a:p>
+          <a:p>
+            <a:pPr>
+              <a:spcAft>
+                <a:spcPts val="600"/>
+              </a:spcAft>
+            </a:pPr>
+            <a:r>
+              <a:rPr sz="1500">
+                <a:solidFill>
+                  <a:srgbClr val="22282E"/>
+                </a:solidFill>
+              </a:rPr>
+              <a:t>•  Landing page captura contraseñas — Configuración por defecto peligrosa. Desactiva la captura en un simulacro ético.</a:t>
+            </a:r>
+          </a:p>
+          <a:p>
+            <a:pPr>
+              <a:spcAft>
+                <a:spcPts val="600"/>
+              </a:spcAft>
+            </a:pPr>
+            <a:r>
+              <a:rPr sz="1500">
+                <a:solidFill>
+                  <a:srgbClr val="22282E"/>
+                </a:solidFill>
+              </a:rPr>
+              <a:t>•  Campaña llega a no autorizados — Grupo mal filtrado. Verifica la lista antes de lanzar.</a:t>
+            </a:r>
+          </a:p>
+          <a:p>
+            <a:pPr>
+              <a:spcAft>
+                <a:spcPts val="600"/>
+              </a:spcAft>
+            </a:pPr>
+            <a:r>
+              <a:rPr sz="1500">
+                <a:solidFill>
+                  <a:srgbClr val="22282E"/>
+                </a:solidFill>
+              </a:rPr>
+              <a:t>•  Empleados molestos/desconfiados — Faltó comunicación y enfoque educativo. Forma, no castigues.</a:t>
+            </a:r>
+          </a:p>
+        </p:txBody>
+      </p:sp>
+    </p:spTree>
+  </p:cSld>
+  <p:clrMapOvr>
+    <a:masterClrMapping/>
+  </p:clrMapOvr>
+</p:sld>
+</file>
+
+<file path=ppt/slides/slide15.xml><?xml version="1.0" encoding="utf-8"?>
+<p:sld xmlns:a="http://schemas.openxmlformats.org/drawingml/2006/main" xmlns:p="http://schemas.openxmlformats.org/presentationml/2006/main" xmlns:r="http://schemas.openxmlformats.org/officeDocument/2006/relationships">
+  <p:cSld>
+    <p:spTree>
+      <p:nvGrpSpPr>
+        <p:cNvPr id="1" name=""/>
+        <p:cNvGrpSpPr/>
+        <p:nvPr/>
+      </p:nvGrpSpPr>
+      <p:grpSpPr/>
+      <p:sp>
+        <p:nvSpPr>
+          <p:cNvPr id="2" name="TextBox 1"/>
+          <p:cNvSpPr txBox="1"/>
+          <p:nvPr/>
+        </p:nvSpPr>
+        <p:spPr>
+          <a:xfrm>
+            <a:off x="457200" y="320040"/>
+            <a:ext cx="8229600" cy="822960"/>
+          </a:xfrm>
+          <a:prstGeom prst="rect">
+            <a:avLst/>
+          </a:prstGeom>
+          <a:noFill/>
+        </p:spPr>
+        <p:txBody>
+          <a:bodyPr wrap="square">
+            <a:spAutoFit/>
+          </a:bodyPr>
+          <a:lstStyle/>
+          <a:p>
+            <a:r>
+              <a:rPr sz="2600" b="1">
+                <a:solidFill>
+                  <a:srgbClr val="0B3D2E"/>
+                </a:solidFill>
+              </a:rPr>
+              <a:t>❓ Preguntas frecuentes</a:t>
+            </a:r>
+          </a:p>
+        </p:txBody>
+      </p:sp>
+      <p:sp>
+        <p:nvSpPr>
+          <p:cNvPr id="3" name="TextBox 2"/>
+          <p:cNvSpPr txBox="1"/>
+          <p:nvPr/>
+        </p:nvSpPr>
+        <p:spPr>
+          <a:xfrm>
+            <a:off x="457200" y="1280160"/>
+            <a:ext cx="8229600" cy="4937760"/>
+          </a:xfrm>
+          <a:prstGeom prst="rect">
+            <a:avLst/>
+          </a:prstGeom>
+          <a:noFill/>
+        </p:spPr>
+        <p:txBody>
+          <a:bodyPr wrap="square">
+            <a:spAutoFit/>
+          </a:bodyPr>
+          <a:lstStyle/>
+          <a:p>
+            <a:pPr>
+              <a:spcAft>
+                <a:spcPts val="600"/>
+              </a:spcAft>
+            </a:pPr>
+            <a:r>
+              <a:rPr sz="1500">
+                <a:solidFill>
+                  <a:srgbClr val="22282E"/>
+                </a:solidFill>
+              </a:rPr>
+              <a:t>•  ❓ ¿GoPhish roba contraseñas?</a:t>
+            </a:r>
+          </a:p>
+          <a:p>
+            <a:pPr>
+              <a:spcAft>
+                <a:spcPts val="600"/>
+              </a:spcAft>
+            </a:pPr>
+            <a:r>
+              <a:rPr sz="1500">
+                <a:solidFill>
+                  <a:srgbClr val="22282E"/>
+                </a:solidFill>
+              </a:rPr>
+              <a:t>•  Puede capturar lo enviado en un formulario, pero en un simulacro ético se desactiva esa captura:</a:t>
+            </a:r>
+          </a:p>
+          <a:p>
+            <a:pPr>
+              <a:spcAft>
+                <a:spcPts val="600"/>
+              </a:spcAft>
+            </a:pPr>
+            <a:r>
+              <a:rPr sz="1500">
+                <a:solidFill>
+                  <a:srgbClr val="22282E"/>
+                </a:solidFill>
+              </a:rPr>
+              <a:t>•  solo se registra el evento del clic para medir, no la credencial.</a:t>
+            </a:r>
+          </a:p>
+          <a:p>
+            <a:pPr>
+              <a:spcAft>
+                <a:spcPts val="600"/>
+              </a:spcAft>
+            </a:pPr>
+            <a:r>
+              <a:rPr sz="1500">
+                <a:solidFill>
+                  <a:srgbClr val="22282E"/>
+                </a:solidFill>
+              </a:rPr>
+              <a:t>•  ❓ ¿Aviso a los empleados de que habrá simulacros?</a:t>
+            </a:r>
+          </a:p>
+          <a:p>
+            <a:pPr>
+              <a:spcAft>
+                <a:spcPts val="600"/>
+              </a:spcAft>
+            </a:pPr>
+            <a:r>
+              <a:rPr sz="1500">
+                <a:solidFill>
+                  <a:srgbClr val="22282E"/>
+                </a:solidFill>
+              </a:rPr>
+              <a:t>•  Se comunica la política general (que pueden ocurrir simulacros) sin anunciar cada campaña. La</a:t>
+            </a:r>
+          </a:p>
+          <a:p>
+            <a:pPr>
+              <a:spcAft>
+                <a:spcPts val="600"/>
+              </a:spcAft>
+            </a:pPr>
+            <a:r>
+              <a:rPr sz="1500">
+                <a:solidFill>
+                  <a:srgbClr val="22282E"/>
+                </a:solidFill>
+              </a:rPr>
+              <a:t>•  transparencia del programa y el enfoque formativo son clave.</a:t>
+            </a:r>
+          </a:p>
+          <a:p>
+            <a:pPr>
+              <a:spcAft>
+                <a:spcPts val="600"/>
+              </a:spcAft>
+            </a:pPr>
+            <a:r>
+              <a:rPr sz="1500">
+                <a:solidFill>
+                  <a:srgbClr val="22282E"/>
+                </a:solidFill>
+              </a:rPr>
+              <a:t>•  ❓ ¿Qué métrica importa más?</a:t>
+            </a:r>
+          </a:p>
+        </p:txBody>
+      </p:sp>
+    </p:spTree>
+  </p:cSld>
+  <p:clrMapOvr>
+    <a:masterClrMapping/>
+  </p:clrMapOvr>
+</p:sld>
+</file>
+
+<file path=ppt/slides/slide16.xml><?xml version="1.0" encoding="utf-8"?>
+<p:sld xmlns:a="http://schemas.openxmlformats.org/drawingml/2006/main" xmlns:p="http://schemas.openxmlformats.org/presentationml/2006/main" xmlns:r="http://schemas.openxmlformats.org/officeDocument/2006/relationships">
+  <p:cSld>
+    <p:spTree>
+      <p:nvGrpSpPr>
+        <p:cNvPr id="1" name=""/>
+        <p:cNvGrpSpPr/>
+        <p:nvPr/>
+      </p:nvGrpSpPr>
+      <p:grpSpPr/>
+      <p:sp>
+        <p:nvSpPr>
+          <p:cNvPr id="2" name="TextBox 1"/>
+          <p:cNvSpPr txBox="1"/>
+          <p:nvPr/>
+        </p:nvSpPr>
+        <p:spPr>
+          <a:xfrm>
+            <a:off x="457200" y="320040"/>
+            <a:ext cx="8229600" cy="822960"/>
+          </a:xfrm>
+          <a:prstGeom prst="rect">
+            <a:avLst/>
+          </a:prstGeom>
+          <a:noFill/>
+        </p:spPr>
+        <p:txBody>
+          <a:bodyPr wrap="square">
+            <a:spAutoFit/>
+          </a:bodyPr>
+          <a:lstStyle/>
+          <a:p>
+            <a:r>
+              <a:rPr sz="2600" b="1">
+                <a:solidFill>
+                  <a:srgbClr val="0B3D2E"/>
+                </a:solidFill>
+              </a:rPr>
+              <a:t>🔗 Referencias</a:t>
+            </a:r>
+          </a:p>
+        </p:txBody>
+      </p:sp>
+      <p:sp>
+        <p:nvSpPr>
+          <p:cNvPr id="3" name="TextBox 2"/>
+          <p:cNvSpPr txBox="1"/>
+          <p:nvPr/>
+        </p:nvSpPr>
+        <p:spPr>
+          <a:xfrm>
+            <a:off x="457200" y="1280160"/>
+            <a:ext cx="8229600" cy="4937760"/>
+          </a:xfrm>
+          <a:prstGeom prst="rect">
+            <a:avLst/>
+          </a:prstGeom>
+          <a:noFill/>
+        </p:spPr>
+        <p:txBody>
+          <a:bodyPr wrap="square">
+            <a:spAutoFit/>
+          </a:bodyPr>
+          <a:lstStyle/>
+          <a:p>
+            <a:pPr>
+              <a:spcAft>
+                <a:spcPts val="600"/>
+              </a:spcAft>
+            </a:pPr>
+            <a:r>
+              <a:rPr sz="1500">
+                <a:solidFill>
+                  <a:srgbClr val="22282E"/>
+                </a:solidFill>
+              </a:rPr>
               <a:t>•  GoPhish — Documentation. &lt;https://docs.getgophish.com/&gt;</a:t>
             </a:r>
           </a:p>
@@ -3749,6 +4245,81 @@
           </a:p>
         </p:txBody>
       </p:sp>
+    </p:spTree>
+  </p:cSld>
+  <p:clrMapOvr>
+    <a:masterClrMapping/>
+  </p:clrMapOvr>
+</p:sld>
+</file>
+
+<file path=ppt/slides/slide17.xml><?xml version="1.0" encoding="utf-8"?>
+<p:sld xmlns:a="http://schemas.openxmlformats.org/drawingml/2006/main" xmlns:p="http://schemas.openxmlformats.org/presentationml/2006/main" xmlns:r="http://schemas.openxmlformats.org/officeDocument/2006/relationships">
+  <p:cSld>
+    <p:spTree>
+      <p:nvGrpSpPr>
+        <p:cNvPr id="1" name=""/>
+        <p:cNvGrpSpPr/>
+        <p:nvPr/>
+      </p:nvGrpSpPr>
+      <p:grpSpPr/>
+      <p:sp>
+        <p:nvSpPr>
+          <p:cNvPr id="2" name="TextBox 1"/>
+          <p:cNvSpPr txBox="1"/>
+          <p:nvPr/>
+        </p:nvSpPr>
+        <p:spPr>
+          <a:xfrm>
+            <a:off x="457200" y="274320"/>
+            <a:ext cx="8229600" cy="640080"/>
+          </a:xfrm>
+          <a:prstGeom prst="rect">
+            <a:avLst/>
+          </a:prstGeom>
+          <a:noFill/>
+        </p:spPr>
+        <p:txBody>
+          <a:bodyPr wrap="square">
+            <a:spAutoFit/>
+          </a:bodyPr>
+          <a:lstStyle/>
+          <a:p>
+            <a:r>
+              <a:rPr sz="2200" b="1">
+                <a:solidFill>
+                  <a:srgbClr val="0B3D2E"/>
+                </a:solidFill>
+              </a:rPr>
+              <a:t>Diagrama de la clase</a:t>
+            </a:r>
+          </a:p>
+        </p:txBody>
+      </p:sp>
+      <p:pic>
+        <p:nvPicPr>
+          <p:cNvPr id="3" name="Picture 2" descr="35b482037b30ee9c.png"/>
+          <p:cNvPicPr>
+            <a:picLocks noChangeAspect="1"/>
+          </p:cNvPicPr>
+          <p:nvPr/>
+        </p:nvPicPr>
+        <p:blipFill>
+          <a:blip r:embed="rId2"/>
+          <a:stretch>
+            <a:fillRect/>
+          </a:stretch>
+        </p:blipFill>
+        <p:spPr>
+          <a:xfrm>
+            <a:off x="457200" y="3552444"/>
+            <a:ext cx="8229600" cy="393192"/>
+          </a:xfrm>
+          <a:prstGeom prst="rect">
+            <a:avLst/>
+          </a:prstGeom>
+        </p:spPr>
+      </p:pic>
     </p:spTree>
   </p:cSld>
   <p:clrMapOvr>
@@ -4406,7 +4977,7 @@
                   <a:srgbClr val="0B3D2E"/>
                 </a:solidFill>
               </a:rPr>
-              <a:t>📖 Definiciones y características</a:t>
+              <a:t>🧠 Explicación en profundidad</a:t>
             </a:r>
           </a:p>
         </p:txBody>
@@ -4444,82 +5015,67 @@
                   <a:srgbClr val="22282E"/>
                 </a:solidFill>
               </a:rPr>
-              <a:t>•  GoPhish: framework open source para simulacros de phishing. Característica: gestiona campañas y métricas de principio a fin.</a:t>
-            </a:r>
-          </a:p>
-          <a:p>
-            <a:pPr>
-              <a:spcAft>
-                <a:spcPts val="600"/>
-              </a:spcAft>
-            </a:pPr>
-            <a:r>
-              <a:rPr sz="1500">
-                <a:solidFill>
-                  <a:srgbClr val="22282E"/>
-                </a:solidFill>
-              </a:rPr>
-              <a:t>•  Sending profile: configuración SMTP de envío. Característica: define remitente y servidor de la campaña.</a:t>
-            </a:r>
-          </a:p>
-          <a:p>
-            <a:pPr>
-              <a:spcAft>
-                <a:spcPts val="600"/>
-              </a:spcAft>
-            </a:pPr>
-            <a:r>
-              <a:rPr sz="1500">
-                <a:solidFill>
-                  <a:srgbClr val="22282E"/>
-                </a:solidFill>
-              </a:rPr>
-              <a:t>•  Landing page: página a la que llega la víctima al hacer clic. Característica: en un simulacro ético, registra el evento, no la contraseña.</a:t>
-            </a:r>
-          </a:p>
-          <a:p>
-            <a:pPr>
-              <a:spcAft>
-                <a:spcPts val="600"/>
-              </a:spcAft>
-            </a:pPr>
-            <a:r>
-              <a:rPr sz="1500">
-                <a:solidFill>
-                  <a:srgbClr val="22282E"/>
-                </a:solidFill>
-              </a:rPr>
-              <a:t>•  Tracking pixel: imagen que detecta la apertura del correo. Característica: mide aperturas sin interacción.</a:t>
-            </a:r>
-          </a:p>
-          <a:p>
-            <a:pPr>
-              <a:spcAft>
-                <a:spcPts val="600"/>
-              </a:spcAft>
-            </a:pPr>
-            <a:r>
-              <a:rPr sz="1500">
-                <a:solidFill>
-                  <a:srgbClr val="22282E"/>
-                </a:solidFill>
-              </a:rPr>
-              <a:t>•  Grupo objetivo: lista de destinatarios autorizados. Característica: define el alcance del simulacro.</a:t>
-            </a:r>
-          </a:p>
-          <a:p>
-            <a:pPr>
-              <a:spcAft>
-                <a:spcPts val="600"/>
-              </a:spcAft>
-            </a:pPr>
-            <a:r>
-              <a:rPr sz="1500">
-                <a:solidFill>
-                  <a:srgbClr val="22282E"/>
-                </a:solidFill>
-              </a:rPr>
-              <a:t>•  Tasa de reporte: porcentaje que reporta el correo como sospechoso. Característica: la métrica defensiva más valiosa.</a:t>
+              <a:t>•  GoPhish facilita plantillas, envío, páginas y eventos, pero la herramienta no convierte una campaña en ética ni útil. Antes se define la pregunta: ¿el canal de reporte funciona?, ¿un proceso…</a:t>
+            </a:r>
+          </a:p>
+          <a:p>
+            <a:pPr>
+              <a:spcAft>
+                <a:spcPts val="600"/>
+              </a:spcAft>
+            </a:pPr>
+            <a:r>
+              <a:rPr sz="1500">
+                <a:solidFill>
+                  <a:srgbClr val="22282E"/>
+                </a:solidFill>
+              </a:rPr>
+              <a:t>•  El diagrama incluye piloto, parada, debrief y eliminación porque enviar mensajes es solo una fase. Se excluyen temas que puedan causar daño —despidos, salud, emergencias familiares—, poblaciones…</a:t>
+            </a:r>
+          </a:p>
+          <a:p>
+            <a:pPr>
+              <a:spcAft>
+                <a:spcPts val="600"/>
+              </a:spcAft>
+            </a:pPr>
+            <a:r>
+              <a:rPr sz="1500">
+                <a:solidFill>
+                  <a:srgbClr val="22282E"/>
+                </a:solidFill>
+              </a:rPr>
+              <a:t>•  La apertura es poco fiable por bloqueos de imágenes y escáneres automáticos. El clic también puede provenir de un sandbox. El reporte mediante el canal esperado, el tiempo hasta que SOC recibe una…</a:t>
+            </a:r>
+          </a:p>
+          <a:p>
+            <a:pPr>
+              <a:spcAft>
+                <a:spcPts val="600"/>
+              </a:spcAft>
+            </a:pPr>
+            <a:r>
+              <a:rPr sz="1500">
+                <a:solidFill>
+                  <a:srgbClr val="22282E"/>
+                </a:solidFill>
+              </a:rPr>
+              <a:t>•  El dominio, DKIM/SPF/DMARC, listas y horarios se configuran sobre infraestructura autorizada. SOC conoce el ejercicio mediante un mecanismo que permita evaluar el playbook sin provocar una respuesta…</a:t>
+            </a:r>
+          </a:p>
+          <a:p>
+            <a:pPr>
+              <a:spcAft>
+                <a:spcPts val="600"/>
+              </a:spcAft>
+            </a:pPr>
+            <a:r>
+              <a:rPr sz="1500">
+                <a:solidFill>
+                  <a:srgbClr val="22282E"/>
+                </a:solidFill>
+              </a:rPr>
+              <a:t>•  Una campaña produce cero clics. El equipo celebra, pero el gateway bloqueó todos los correos y nadie evaluó reporte, autenticación ni proceso. La conclusión correcta es que el control de correo…</a:t>
             </a:r>
           </a:p>
         </p:txBody>
@@ -4570,7 +5126,7 @@
                   <a:srgbClr val="0B3D2E"/>
                 </a:solidFill>
               </a:rPr>
-              <a:t>🧰 Herramientas y preparación</a:t>
+              <a:t>📔 Glosario operativo</a:t>
             </a:r>
           </a:p>
         </p:txBody>
@@ -4608,67 +5164,82 @@
                   <a:srgbClr val="22282E"/>
                 </a:solidFill>
               </a:rPr>
-              <a:t>•  GoPhish: descarga el binario de getgophish.com, ejecútalo en una VM aislada; primer login con la contraseña que muestra el log.</a:t>
-            </a:r>
-          </a:p>
-          <a:p>
-            <a:pPr>
-              <a:spcAft>
-                <a:spcPts val="600"/>
-              </a:spcAft>
-            </a:pPr>
-            <a:r>
-              <a:rPr sz="1500">
-                <a:solidFill>
-                  <a:srgbClr val="22282E"/>
-                </a:solidFill>
-              </a:rPr>
-              <a:t>•  Servidor de correo de laboratorio: MailHog/Postfix propio o un SMTP de pruebas; nunca un dominio ajeno.</a:t>
-            </a:r>
-          </a:p>
-          <a:p>
-            <a:pPr>
-              <a:spcAft>
-                <a:spcPts val="600"/>
-              </a:spcAft>
-            </a:pPr>
-            <a:r>
-              <a:rPr sz="1500">
-                <a:solidFill>
-                  <a:srgbClr val="22282E"/>
-                </a:solidFill>
-              </a:rPr>
-              <a:t>•  Dominio y TLS de prueba: para landing pages; certificado Let's Encrypt en el lab.</a:t>
-            </a:r>
-          </a:p>
-          <a:p>
-            <a:pPr>
-              <a:spcAft>
-                <a:spcPts val="600"/>
-              </a:spcAft>
-            </a:pPr>
-            <a:r>
-              <a:rPr sz="1500">
-                <a:solidFill>
-                  <a:srgbClr val="22282E"/>
-                </a:solidFill>
-              </a:rPr>
-              <a:t>•  Grupo de prueba: cuentas propias o compañeros consintientes.</a:t>
-            </a:r>
-          </a:p>
-          <a:p>
-            <a:pPr>
-              <a:spcAft>
-                <a:spcPts val="600"/>
-              </a:spcAft>
-            </a:pPr>
-            <a:r>
-              <a:rPr sz="1500">
-                <a:solidFill>
-                  <a:srgbClr val="22282E"/>
-                </a:solidFill>
-              </a:rPr>
-              <a:t>•  Recordatorio: este ejercicio se hace contra tu propio entorno o con autorización escrita; las landing pages no almacenan credenciales reales.</a:t>
+              <a:t>•  Término — Definición útil</a:t>
+            </a:r>
+          </a:p>
+          <a:p>
+            <a:pPr>
+              <a:spcAft>
+                <a:spcPts val="600"/>
+              </a:spcAft>
+            </a:pPr>
+            <a:r>
+              <a:rPr sz="1500">
+                <a:solidFill>
+                  <a:srgbClr val="22282E"/>
+                </a:solidFill>
+              </a:rPr>
+              <a:t>•  Landing de simulación — Página controlada que educa y no captura secretos reales.</a:t>
+            </a:r>
+          </a:p>
+          <a:p>
+            <a:pPr>
+              <a:spcAft>
+                <a:spcPts val="600"/>
+              </a:spcAft>
+            </a:pPr>
+            <a:r>
+              <a:rPr sz="1500">
+                <a:solidFill>
+                  <a:srgbClr val="22282E"/>
+                </a:solidFill>
+              </a:rPr>
+              <a:t>•  Parada de emergencia — Procedimiento para detener envíos y retirar infraestructura.</a:t>
+            </a:r>
+          </a:p>
+          <a:p>
+            <a:pPr>
+              <a:spcAft>
+                <a:spcPts val="600"/>
+              </a:spcAft>
+            </a:pPr>
+            <a:r>
+              <a:rPr sz="1500">
+                <a:solidFill>
+                  <a:srgbClr val="22282E"/>
+                </a:solidFill>
+              </a:rPr>
+              <a:t>•  Debrief — Explicación posterior que conecta señales, proceso y aprendizaje.</a:t>
+            </a:r>
+          </a:p>
+          <a:p>
+            <a:pPr>
+              <a:spcAft>
+                <a:spcPts val="600"/>
+              </a:spcAft>
+            </a:pPr>
+            <a:r>
+              <a:rPr sz="1500">
+                <a:solidFill>
+                  <a:srgbClr val="22282E"/>
+                </a:solidFill>
+              </a:rPr>
+              <a:t>•  Métrica agregada — Resultado grupal que reduce exposición individual.</a:t>
+            </a:r>
+          </a:p>
+          <a:p>
+            <a:pPr>
+              <a:spcAft>
+                <a:spcPts val="600"/>
+              </a:spcAft>
+            </a:pPr>
+            <a:r>
+              <a:rPr sz="1500">
+                <a:solidFill>
+                  <a:srgbClr val="22282E"/>
+                </a:solidFill>
+              </a:rPr>
+              <a:t>•  Escáner automático — Sistema que puede abrir enlaces y contaminar métricas.</a:t>
             </a:r>
           </a:p>
         </p:txBody>
@@ -4719,7 +5290,7 @@
                   <a:srgbClr val="0B3D2E"/>
                 </a:solidFill>
               </a:rPr>
-              <a:t>🧪 Laboratorio guiado (entorno propio / autorizado)</a:t>
+              <a:t>✅ Criterio de dominio</a:t>
             </a:r>
           </a:p>
         </p:txBody>
@@ -4757,97 +5328,7 @@
                   <a:srgbClr val="22282E"/>
                 </a:solidFill>
               </a:rPr>
-              <a:t>•  Arranca GoPhish en la VM y accede al panel https://127.0.0.1:3333; cambia la contraseña inicial.</a:t>
-            </a:r>
-          </a:p>
-          <a:p>
-            <a:pPr>
-              <a:spcAft>
-                <a:spcPts val="600"/>
-              </a:spcAft>
-            </a:pPr>
-            <a:r>
-              <a:rPr sz="1500">
-                <a:solidFill>
-                  <a:srgbClr val="22282E"/>
-                </a:solidFill>
-              </a:rPr>
-              <a:t>•  Crea un Sending Profile apuntando a tu SMTP de laboratorio (MailHog/Postfix).</a:t>
-            </a:r>
-          </a:p>
-          <a:p>
-            <a:pPr>
-              <a:spcAft>
-                <a:spcPts val="600"/>
-              </a:spcAft>
-            </a:pPr>
-            <a:r>
-              <a:rPr sz="1500">
-                <a:solidFill>
-                  <a:srgbClr val="22282E"/>
-                </a:solidFill>
-              </a:rPr>
-              <a:t>•  Diseña una Email Template con un pretexto realista (ej.: "actualiza tu acceso") y añade el tracking.</a:t>
-            </a:r>
-          </a:p>
-          <a:p>
-            <a:pPr>
-              <a:spcAft>
-                <a:spcPts val="600"/>
-              </a:spcAft>
-            </a:pPr>
-            <a:r>
-              <a:rPr sz="1500">
-                <a:solidFill>
-                  <a:srgbClr val="22282E"/>
-                </a:solidFill>
-              </a:rPr>
-              <a:t>•  Crea una Landing Page que muestre un mensaje educativo tras el clic; desactiva la captura de contraseñas.</a:t>
-            </a:r>
-          </a:p>
-          <a:p>
-            <a:pPr>
-              <a:spcAft>
-                <a:spcPts val="600"/>
-              </a:spcAft>
-            </a:pPr>
-            <a:r>
-              <a:rPr sz="1500">
-                <a:solidFill>
-                  <a:srgbClr val="22282E"/>
-                </a:solidFill>
-              </a:rPr>
-              <a:t>•  Define un Users &amp; Groups con cuentas de prueba propias.</a:t>
-            </a:r>
-          </a:p>
-          <a:p>
-            <a:pPr>
-              <a:spcAft>
-                <a:spcPts val="600"/>
-              </a:spcAft>
-            </a:pPr>
-            <a:r>
-              <a:rPr sz="1500">
-                <a:solidFill>
-                  <a:srgbClr val="22282E"/>
-                </a:solidFill>
-              </a:rPr>
-              <a:t>•  Lanza la Campaign enlazando profile, template, page y grupo; envía a las cuentas de laboratorio.</a:t>
-            </a:r>
-          </a:p>
-          <a:p>
-            <a:pPr>
-              <a:spcAft>
-                <a:spcPts val="600"/>
-              </a:spcAft>
-            </a:pPr>
-            <a:r>
-              <a:rPr sz="1500">
-                <a:solidFill>
-                  <a:srgbClr val="22282E"/>
-                </a:solidFill>
-              </a:rPr>
-              <a:t>•  Observa el dashboard en tiempo real: enviados, abiertos, clicados, formularios.</a:t>
+              <a:t>•  Existe dominio cuando el alumno diseña una campaña aprobada desde una pregunta defensiva, minimiza datos y daño, distingue eventos humanos de automatizados, prepara respuesta y traduce resultados en…</a:t>
             </a:r>
           </a:p>
         </p:txBody>
@@ -4898,7 +5379,7 @@
                   <a:srgbClr val="0B3D2E"/>
                 </a:solidFill>
               </a:rPr>
-              <a:t>✍️ Ejercicios</a:t>
+              <a:t>📖 Definiciones y características</a:t>
             </a:r>
           </a:p>
         </p:txBody>
@@ -4936,82 +5417,82 @@
                   <a:srgbClr val="22282E"/>
                 </a:solidFill>
               </a:rPr>
-              <a:t>•  Crea dos plantillas con distinto nivel de urgencia y compara (hipotéticamente) su impacto.</a:t>
-            </a:r>
-          </a:p>
-          <a:p>
-            <a:pPr>
-              <a:spcAft>
-                <a:spcPts val="600"/>
-              </a:spcAft>
-            </a:pPr>
-            <a:r>
-              <a:rPr sz="1500">
-                <a:solidFill>
-                  <a:srgbClr val="22282E"/>
-                </a:solidFill>
-              </a:rPr>
-              <a:t>•  Configura una landing page que solo eduque, sin capturar credenciales, y explica por qué.</a:t>
-            </a:r>
-          </a:p>
-          <a:p>
-            <a:pPr>
-              <a:spcAft>
-                <a:spcPts val="600"/>
-              </a:spcAft>
-            </a:pPr>
-            <a:r>
-              <a:rPr sz="1500">
-                <a:solidFill>
-                  <a:srgbClr val="22282E"/>
-                </a:solidFill>
-              </a:rPr>
-              <a:t>•  Interpreta un dashboard de campaña y prioriza acciones.</a:t>
-            </a:r>
-          </a:p>
-          <a:p>
-            <a:pPr>
-              <a:spcAft>
-                <a:spcPts val="600"/>
-              </a:spcAft>
-            </a:pPr>
-            <a:r>
-              <a:rPr sz="1500">
-                <a:solidFill>
-                  <a:srgbClr val="22282E"/>
-                </a:solidFill>
-              </a:rPr>
-              <a:t>•  Diseña la comunicación posterior que forma sin culpabilizar.</a:t>
-            </a:r>
-          </a:p>
-          <a:p>
-            <a:pPr>
-              <a:spcAft>
-                <a:spcPts val="600"/>
-              </a:spcAft>
-            </a:pPr>
-            <a:r>
-              <a:rPr sz="1500">
-                <a:solidFill>
-                  <a:srgbClr val="22282E"/>
-                </a:solidFill>
-              </a:rPr>
-              <a:t>•  Explica cómo evitar que la campaña afecte a personas fuera del alcance.</a:t>
-            </a:r>
-          </a:p>
-          <a:p>
-            <a:pPr>
-              <a:spcAft>
-                <a:spcPts val="600"/>
-              </a:spcAft>
-            </a:pPr>
-            <a:r>
-              <a:rPr sz="1500">
-                <a:solidFill>
-                  <a:srgbClr val="22282E"/>
-                </a:solidFill>
-              </a:rPr>
-              <a:t>•  Investiga los requisitos legales de un simulacro de phishing corporativo en tu región.</a:t>
+              <a:t>•  GoPhish: framework open source para simulacros de phishing. Característica: gestiona campañas y métricas de principio a fin.</a:t>
+            </a:r>
+          </a:p>
+          <a:p>
+            <a:pPr>
+              <a:spcAft>
+                <a:spcPts val="600"/>
+              </a:spcAft>
+            </a:pPr>
+            <a:r>
+              <a:rPr sz="1500">
+                <a:solidFill>
+                  <a:srgbClr val="22282E"/>
+                </a:solidFill>
+              </a:rPr>
+              <a:t>•  Sending profile: configuración SMTP de envío. Característica: define remitente y servidor de la campaña.</a:t>
+            </a:r>
+          </a:p>
+          <a:p>
+            <a:pPr>
+              <a:spcAft>
+                <a:spcPts val="600"/>
+              </a:spcAft>
+            </a:pPr>
+            <a:r>
+              <a:rPr sz="1500">
+                <a:solidFill>
+                  <a:srgbClr val="22282E"/>
+                </a:solidFill>
+              </a:rPr>
+              <a:t>•  Landing page: página a la que llega la víctima al hacer clic. Característica: en un simulacro ético, registra el evento, no la contraseña.</a:t>
+            </a:r>
+          </a:p>
+          <a:p>
+            <a:pPr>
+              <a:spcAft>
+                <a:spcPts val="600"/>
+              </a:spcAft>
+            </a:pPr>
+            <a:r>
+              <a:rPr sz="1500">
+                <a:solidFill>
+                  <a:srgbClr val="22282E"/>
+                </a:solidFill>
+              </a:rPr>
+              <a:t>•  Tracking pixel: imagen que detecta la apertura del correo. Característica: mide aperturas sin interacción.</a:t>
+            </a:r>
+          </a:p>
+          <a:p>
+            <a:pPr>
+              <a:spcAft>
+                <a:spcPts val="600"/>
+              </a:spcAft>
+            </a:pPr>
+            <a:r>
+              <a:rPr sz="1500">
+                <a:solidFill>
+                  <a:srgbClr val="22282E"/>
+                </a:solidFill>
+              </a:rPr>
+              <a:t>•  Grupo objetivo: lista de destinatarios autorizados. Característica: define el alcance del simulacro.</a:t>
+            </a:r>
+          </a:p>
+          <a:p>
+            <a:pPr>
+              <a:spcAft>
+                <a:spcPts val="600"/>
+              </a:spcAft>
+            </a:pPr>
+            <a:r>
+              <a:rPr sz="1500">
+                <a:solidFill>
+                  <a:srgbClr val="22282E"/>
+                </a:solidFill>
+              </a:rPr>
+              <a:t>•  Tasa de reporte: porcentaje que reporta el correo como sospechoso. Característica: la métrica defensiva más valiosa.</a:t>
             </a:r>
           </a:p>
         </p:txBody>
